--- a/inbox/Application Aware Networking/Vol_VII_Book_03_FedAAN_Azure_Control_Compliance_Automation.pptx
+++ b/inbox/Application Aware Networking/Vol_VII_Book_03_FedAAN_Azure_Control_Compliance_Automation.pptx
@@ -10405,7 +10405,7 @@
                           </a:solidFill>
                           <a:latin typeface="Arial"/>
                         </a:rPr>
-                        <a:t>Vulnerability Monitoring</a:t>
+                        <a:t>Vulnerability Monitoring and Scanning</a:t>
                       </a:r>
                     </a:p>
                   </a:txBody>
